--- a/01-presentation_v.3.pptx
+++ b/01-presentation_v.3.pptx
@@ -5,7 +5,7 @@
     <p:sldMasterId id="2147483648" r:id="rId1"/>
   </p:sldMasterIdLst>
   <p:notesMasterIdLst>
-    <p:notesMasterId r:id="rId16"/>
+    <p:notesMasterId r:id="rId17"/>
   </p:notesMasterIdLst>
   <p:sldIdLst>
     <p:sldId id="256" r:id="rId2"/>
@@ -16,12 +16,13 @@
     <p:sldId id="261" r:id="rId7"/>
     <p:sldId id="262" r:id="rId8"/>
     <p:sldId id="263" r:id="rId9"/>
-    <p:sldId id="264" r:id="rId10"/>
-    <p:sldId id="265" r:id="rId11"/>
-    <p:sldId id="266" r:id="rId12"/>
-    <p:sldId id="267" r:id="rId13"/>
-    <p:sldId id="268" r:id="rId14"/>
-    <p:sldId id="269" r:id="rId15"/>
+    <p:sldId id="270" r:id="rId10"/>
+    <p:sldId id="264" r:id="rId11"/>
+    <p:sldId id="265" r:id="rId12"/>
+    <p:sldId id="266" r:id="rId13"/>
+    <p:sldId id="267" r:id="rId14"/>
+    <p:sldId id="268" r:id="rId15"/>
+    <p:sldId id="269" r:id="rId16"/>
   </p:sldIdLst>
   <p:sldSz cx="12192000" cy="6858000"/>
   <p:notesSz cx="6858000" cy="12192000"/>
@@ -660,7 +661,7 @@
           <a:p>
             <a:fld id="{F7021451-1387-4CA6-816F-3879F97B5CBC}" type="slidenum">
               <a:rPr lang="en-US"/>
-              <a:t>10</a:t>
+              <a:t>11</a:t>
             </a:fld>
             <a:endParaRPr lang="en-US"/>
           </a:p>
@@ -747,7 +748,7 @@
           <a:p>
             <a:fld id="{F7021451-1387-4CA6-816F-3879F97B5CBC}" type="slidenum">
               <a:rPr lang="en-US"/>
-              <a:t>11</a:t>
+              <a:t>12</a:t>
             </a:fld>
             <a:endParaRPr lang="en-US"/>
           </a:p>
@@ -834,7 +835,7 @@
           <a:p>
             <a:fld id="{F7021451-1387-4CA6-816F-3879F97B5CBC}" type="slidenum">
               <a:rPr lang="en-US"/>
-              <a:t>12</a:t>
+              <a:t>13</a:t>
             </a:fld>
             <a:endParaRPr lang="en-US"/>
           </a:p>
@@ -921,7 +922,7 @@
           <a:p>
             <a:fld id="{F7021451-1387-4CA6-816F-3879F97B5CBC}" type="slidenum">
               <a:rPr lang="en-US"/>
-              <a:t>13</a:t>
+              <a:t>14</a:t>
             </a:fld>
             <a:endParaRPr lang="en-US"/>
           </a:p>
@@ -1008,7 +1009,7 @@
           <a:p>
             <a:fld id="{F7021451-1387-4CA6-816F-3879F97B5CBC}" type="slidenum">
               <a:rPr lang="en-US"/>
-              <a:t>14</a:t>
+              <a:t>15</a:t>
             </a:fld>
             <a:endParaRPr lang="en-US"/>
           </a:p>
@@ -1704,7 +1705,7 @@
           <a:p>
             <a:fld id="{F7021451-1387-4CA6-816F-3879F97B5CBC}" type="slidenum">
               <a:rPr lang="en-US"/>
-              <a:t>9</a:t>
+              <a:t>10</a:t>
             </a:fld>
             <a:endParaRPr lang="en-US"/>
           </a:p>
@@ -2269,6 +2270,446 @@
 
 <file path=ppt/slides/slide10.xml><?xml version="1.0" encoding="utf-8"?>
 <p:sld xmlns:a="http://schemas.openxmlformats.org/drawingml/2006/main" xmlns:r="http://schemas.openxmlformats.org/officeDocument/2006/relationships" xmlns:p="http://schemas.openxmlformats.org/presentationml/2006/main">
+  <p:cSld name="Slide 9">
+    <p:bg>
+      <p:bgPr>
+        <a:solidFill>
+          <a:srgbClr val="FFFFFF"/>
+        </a:solidFill>
+        <a:effectLst/>
+      </p:bgPr>
+    </p:bg>
+    <p:spTree>
+      <p:nvGrpSpPr>
+        <p:cNvPr id="1" name=""/>
+        <p:cNvGrpSpPr/>
+        <p:nvPr/>
+      </p:nvGrpSpPr>
+      <p:grpSpPr>
+        <a:xfrm>
+          <a:off x="0" y="0"/>
+          <a:ext cx="0" cy="0"/>
+          <a:chOff x="0" y="0"/>
+          <a:chExt cx="0" cy="0"/>
+        </a:xfrm>
+      </p:grpSpPr>
+      <p:sp>
+        <p:nvSpPr>
+          <p:cNvPr id="2" name="Shape 0"/>
+          <p:cNvSpPr/>
+          <p:nvPr/>
+        </p:nvSpPr>
+        <p:spPr>
+          <a:xfrm>
+            <a:off x="0" y="274320"/>
+            <a:ext cx="2148840" cy="420624"/>
+          </a:xfrm>
+          <a:prstGeom prst="rect">
+            <a:avLst/>
+          </a:prstGeom>
+          <a:solidFill>
+            <a:srgbClr val="000000"/>
+          </a:solidFill>
+          <a:ln/>
+        </p:spPr>
+      </p:sp>
+      <p:sp>
+        <p:nvSpPr>
+          <p:cNvPr id="3" name="Text 1"/>
+          <p:cNvSpPr txBox="1"/>
+          <p:nvPr/>
+        </p:nvSpPr>
+        <p:spPr>
+          <a:xfrm>
+            <a:off x="566928" y="274320"/>
+            <a:ext cx="1737360" cy="420624"/>
+          </a:xfrm>
+          <a:prstGeom prst="rect">
+            <a:avLst/>
+          </a:prstGeom>
+          <a:noFill/>
+          <a:ln/>
+        </p:spPr>
+        <p:txBody>
+          <a:bodyPr wrap="square" lIns="0" tIns="0" rIns="0" bIns="0" rtlCol="0" anchor="ctr"/>
+          <a:lstStyle/>
+          <a:p>
+            <a:pPr marL="0" indent="0">
+              <a:buNone/>
+            </a:pPr>
+            <a:r>
+              <a:rPr lang="en-US" sz="1400" b="1" kern="0" spc="200" dirty="0">
+                <a:solidFill>
+                  <a:srgbClr val="FFFFFF"/>
+                </a:solidFill>
+                <a:latin typeface="Calibri" pitchFamily="34" charset="0"/>
+                <a:ea typeface="Calibri" pitchFamily="34" charset="-122"/>
+                <a:cs typeface="Calibri" pitchFamily="34" charset="-120"/>
+              </a:rPr>
+              <a:t>APPENDIX 1</a:t>
+            </a:r>
+            <a:endParaRPr lang="en-US" sz="1400" dirty="0"/>
+          </a:p>
+        </p:txBody>
+      </p:sp>
+      <p:sp>
+        <p:nvSpPr>
+          <p:cNvPr id="4" name="Text 2"/>
+          <p:cNvSpPr txBox="1"/>
+          <p:nvPr/>
+        </p:nvSpPr>
+        <p:spPr>
+          <a:xfrm>
+            <a:off x="10616184" y="292608"/>
+            <a:ext cx="1005840" cy="822960"/>
+          </a:xfrm>
+          <a:prstGeom prst="rect">
+            <a:avLst/>
+          </a:prstGeom>
+          <a:noFill/>
+          <a:ln/>
+        </p:spPr>
+        <p:txBody>
+          <a:bodyPr wrap="square" lIns="0" tIns="0" rIns="0" bIns="0" rtlCol="0" anchor="ctr"/>
+          <a:lstStyle/>
+          <a:p>
+            <a:pPr marL="0" indent="0" algn="r">
+              <a:buNone/>
+            </a:pPr>
+            <a:r>
+              <a:rPr lang="en-US" sz="4400" b="1" dirty="0">
+                <a:solidFill>
+                  <a:srgbClr val="FFD9C2"/>
+                </a:solidFill>
+                <a:latin typeface="Cambria" pitchFamily="34" charset="0"/>
+                <a:ea typeface="Cambria" pitchFamily="34" charset="-122"/>
+                <a:cs typeface="Cambria" pitchFamily="34" charset="-120"/>
+              </a:rPr>
+              <a:t>A1</a:t>
+            </a:r>
+            <a:endParaRPr lang="en-US" sz="4400" dirty="0"/>
+          </a:p>
+        </p:txBody>
+      </p:sp>
+      <p:sp>
+        <p:nvSpPr>
+          <p:cNvPr id="5" name="Text 3"/>
+          <p:cNvSpPr txBox="1"/>
+          <p:nvPr/>
+        </p:nvSpPr>
+        <p:spPr>
+          <a:xfrm>
+            <a:off x="566928" y="932688"/>
+            <a:ext cx="8229600" cy="310896"/>
+          </a:xfrm>
+          <a:prstGeom prst="rect">
+            <a:avLst/>
+          </a:prstGeom>
+          <a:noFill/>
+          <a:ln/>
+        </p:spPr>
+        <p:txBody>
+          <a:bodyPr wrap="square" lIns="0" tIns="0" rIns="0" bIns="0" rtlCol="0" anchor="ctr"/>
+          <a:lstStyle/>
+          <a:p>
+            <a:pPr marL="0" indent="0">
+              <a:buNone/>
+            </a:pPr>
+            <a:r>
+              <a:rPr lang="en-US" sz="1500" b="1" kern="0" spc="200" dirty="0">
+                <a:solidFill>
+                  <a:srgbClr val="5F636A"/>
+                </a:solidFill>
+                <a:latin typeface="Calibri" pitchFamily="34" charset="0"/>
+                <a:ea typeface="Calibri" pitchFamily="34" charset="-122"/>
+                <a:cs typeface="Calibri" pitchFamily="34" charset="-120"/>
+              </a:rPr>
+              <a:t>РАСПРЕДЕЛЕНИЕ ПО ЛИГАМ</a:t>
+            </a:r>
+            <a:endParaRPr lang="en-US" sz="1500" dirty="0"/>
+          </a:p>
+        </p:txBody>
+      </p:sp>
+      <p:sp>
+        <p:nvSpPr>
+          <p:cNvPr id="6" name="Text 4"/>
+          <p:cNvSpPr txBox="1"/>
+          <p:nvPr/>
+        </p:nvSpPr>
+        <p:spPr>
+          <a:xfrm>
+            <a:off x="566928" y="1325880"/>
+            <a:ext cx="10049256" cy="1005840"/>
+          </a:xfrm>
+          <a:prstGeom prst="rect">
+            <a:avLst/>
+          </a:prstGeom>
+          <a:noFill/>
+          <a:ln/>
+        </p:spPr>
+        <p:txBody>
+          <a:bodyPr wrap="square" lIns="0" tIns="0" rIns="0" bIns="0" rtlCol="0" anchor="ctr"/>
+          <a:lstStyle/>
+          <a:p>
+            <a:pPr marL="0" indent="0">
+              <a:buNone/>
+            </a:pPr>
+            <a:r>
+              <a:rPr lang="ru-RU" sz="3200" b="1" dirty="0">
+                <a:solidFill>
+                  <a:srgbClr val="000000"/>
+                </a:solidFill>
+                <a:latin typeface="Cambria" pitchFamily="34" charset="0"/>
+                <a:ea typeface="Cambria" pitchFamily="34" charset="-122"/>
+                <a:cs typeface="Cambria" pitchFamily="34" charset="-120"/>
+              </a:rPr>
+              <a:t>Верхние</a:t>
+            </a:r>
+            <a:r>
+              <a:rPr lang="en-US" sz="3200" b="1" dirty="0">
+                <a:solidFill>
+                  <a:srgbClr val="000000"/>
+                </a:solidFill>
+                <a:latin typeface="Cambria" pitchFamily="34" charset="0"/>
+                <a:ea typeface="Cambria" pitchFamily="34" charset="-122"/>
+                <a:cs typeface="Cambria" pitchFamily="34" charset="-120"/>
+              </a:rPr>
+              <a:t> </a:t>
+            </a:r>
+            <a:r>
+              <a:rPr lang="ru-RU" sz="3200" b="1" dirty="0">
+                <a:solidFill>
+                  <a:srgbClr val="000000"/>
+                </a:solidFill>
+                <a:latin typeface="Cambria" pitchFamily="34" charset="0"/>
+                <a:ea typeface="Cambria" pitchFamily="34" charset="-122"/>
+                <a:cs typeface="Cambria" pitchFamily="34" charset="-120"/>
+              </a:rPr>
+              <a:t>три</a:t>
+            </a:r>
+            <a:r>
+              <a:rPr lang="en-US" sz="3200" b="1" dirty="0">
+                <a:solidFill>
+                  <a:srgbClr val="000000"/>
+                </a:solidFill>
+                <a:latin typeface="Cambria" pitchFamily="34" charset="0"/>
+                <a:ea typeface="Cambria" pitchFamily="34" charset="-122"/>
+                <a:cs typeface="Cambria" pitchFamily="34" charset="-120"/>
+              </a:rPr>
+              <a:t> </a:t>
+            </a:r>
+            <a:r>
+              <a:rPr lang="ru-RU" sz="3200" b="1" dirty="0">
+                <a:solidFill>
+                  <a:srgbClr val="000000"/>
+                </a:solidFill>
+                <a:latin typeface="Cambria" pitchFamily="34" charset="0"/>
+                <a:ea typeface="Cambria" pitchFamily="34" charset="-122"/>
+                <a:cs typeface="Cambria" pitchFamily="34" charset="-120"/>
+              </a:rPr>
+              <a:t>лиги</a:t>
+            </a:r>
+            <a:r>
+              <a:rPr lang="en-US" sz="3200" b="1" dirty="0">
+                <a:solidFill>
+                  <a:srgbClr val="000000"/>
+                </a:solidFill>
+                <a:latin typeface="Cambria" pitchFamily="34" charset="0"/>
+                <a:ea typeface="Cambria" pitchFamily="34" charset="-122"/>
+                <a:cs typeface="Cambria" pitchFamily="34" charset="-120"/>
+              </a:rPr>
+              <a:t> </a:t>
+            </a:r>
+            <a:r>
+              <a:rPr lang="ru-RU" sz="3200" b="1" dirty="0">
+                <a:solidFill>
+                  <a:srgbClr val="000000"/>
+                </a:solidFill>
+                <a:latin typeface="Cambria" pitchFamily="34" charset="0"/>
+                <a:ea typeface="Cambria" pitchFamily="34" charset="-122"/>
+                <a:cs typeface="Cambria" pitchFamily="34" charset="-120"/>
+              </a:rPr>
+              <a:t>включают</a:t>
+            </a:r>
+            <a:r>
+              <a:rPr lang="en-US" sz="3200" b="1" dirty="0">
+                <a:solidFill>
+                  <a:srgbClr val="000000"/>
+                </a:solidFill>
+                <a:latin typeface="Cambria" pitchFamily="34" charset="0"/>
+                <a:ea typeface="Cambria" pitchFamily="34" charset="-122"/>
+                <a:cs typeface="Cambria" pitchFamily="34" charset="-120"/>
+              </a:rPr>
+              <a:t> 0,9% участников</a:t>
+            </a:r>
+            <a:endParaRPr lang="en-US" sz="3200" dirty="0"/>
+          </a:p>
+        </p:txBody>
+      </p:sp>
+      <p:graphicFrame>
+        <p:nvGraphicFramePr>
+          <p:cNvPr id="7" name="Chart 0"/>
+          <p:cNvGraphicFramePr/>
+          <p:nvPr/>
+        </p:nvGraphicFramePr>
+        <p:xfrm>
+          <a:off x="566928" y="2395728"/>
+          <a:ext cx="11055096" cy="2926080"/>
+        </p:xfrm>
+        <a:graphic>
+          <a:graphicData uri="http://schemas.openxmlformats.org/drawingml/2006/chart">
+            <c:chart xmlns:c="http://schemas.openxmlformats.org/drawingml/2006/chart" xmlns:r="http://schemas.openxmlformats.org/officeDocument/2006/relationships" r:id="rId3"/>
+          </a:graphicData>
+        </a:graphic>
+      </p:graphicFrame>
+      <p:sp>
+        <p:nvSpPr>
+          <p:cNvPr id="8" name="Text 5"/>
+          <p:cNvSpPr txBox="1"/>
+          <p:nvPr/>
+        </p:nvSpPr>
+        <p:spPr>
+          <a:xfrm>
+            <a:off x="566928" y="6044184"/>
+            <a:ext cx="9601200" cy="310896"/>
+          </a:xfrm>
+          <a:prstGeom prst="rect">
+            <a:avLst/>
+          </a:prstGeom>
+          <a:noFill/>
+          <a:ln/>
+        </p:spPr>
+        <p:txBody>
+          <a:bodyPr wrap="square" lIns="0" tIns="0" rIns="0" bIns="0" rtlCol="0" anchor="ctr"/>
+          <a:lstStyle/>
+          <a:p>
+            <a:pPr marL="0" indent="0">
+              <a:buNone/>
+            </a:pPr>
+            <a:r>
+              <a:rPr lang="ru-RU" sz="1500" dirty="0">
+                <a:solidFill>
+                  <a:srgbClr val="5F636A"/>
+                </a:solidFill>
+                <a:latin typeface="Calibri" pitchFamily="34" charset="0"/>
+                <a:ea typeface="Calibri" pitchFamily="34" charset="-122"/>
+                <a:cs typeface="Calibri" pitchFamily="34" charset="-120"/>
+              </a:rPr>
+              <a:t>Конец</a:t>
+            </a:r>
+            <a:r>
+              <a:rPr lang="en-US" sz="1500" dirty="0">
+                <a:solidFill>
+                  <a:srgbClr val="5F636A"/>
+                </a:solidFill>
+                <a:latin typeface="Calibri" pitchFamily="34" charset="0"/>
+                <a:ea typeface="Calibri" pitchFamily="34" charset="-122"/>
+                <a:cs typeface="Calibri" pitchFamily="34" charset="-120"/>
+              </a:rPr>
+              <a:t> </a:t>
+            </a:r>
+            <a:r>
+              <a:rPr lang="ru-RU" sz="1500" dirty="0">
+                <a:solidFill>
+                  <a:srgbClr val="5F636A"/>
+                </a:solidFill>
+                <a:latin typeface="Calibri" pitchFamily="34" charset="0"/>
+                <a:ea typeface="Calibri" pitchFamily="34" charset="-122"/>
+                <a:cs typeface="Calibri" pitchFamily="34" charset="-120"/>
+              </a:rPr>
+              <a:t>пятого</a:t>
+            </a:r>
+            <a:r>
+              <a:rPr lang="en-US" sz="1500" dirty="0">
+                <a:solidFill>
+                  <a:srgbClr val="5F636A"/>
+                </a:solidFill>
+                <a:latin typeface="Calibri" pitchFamily="34" charset="0"/>
+                <a:ea typeface="Calibri" pitchFamily="34" charset="-122"/>
+                <a:cs typeface="Calibri" pitchFamily="34" charset="-120"/>
+              </a:rPr>
+              <a:t> </a:t>
+            </a:r>
+            <a:r>
+              <a:rPr lang="ru-RU" sz="1500" dirty="0">
+                <a:solidFill>
+                  <a:srgbClr val="5F636A"/>
+                </a:solidFill>
+                <a:latin typeface="Calibri" pitchFamily="34" charset="0"/>
+                <a:ea typeface="Calibri" pitchFamily="34" charset="-122"/>
+                <a:cs typeface="Calibri" pitchFamily="34" charset="-120"/>
+              </a:rPr>
+              <a:t>месячного </a:t>
+            </a:r>
+            <a:r>
+              <a:rPr lang="en-US" sz="1500" dirty="0">
+                <a:solidFill>
+                  <a:srgbClr val="5F636A"/>
+                </a:solidFill>
+                <a:latin typeface="Calibri" pitchFamily="34" charset="0"/>
+                <a:ea typeface="Calibri" pitchFamily="34" charset="-122"/>
+                <a:cs typeface="Calibri" pitchFamily="34" charset="-120"/>
+              </a:rPr>
+              <a:t>цикла, 7 897 участников. </a:t>
+            </a:r>
+            <a:r>
+              <a:rPr lang="ru-RU" sz="1500" dirty="0">
+                <a:solidFill>
+                  <a:srgbClr val="5F636A"/>
+                </a:solidFill>
+                <a:latin typeface="Calibri" pitchFamily="34" charset="0"/>
+                <a:ea typeface="Calibri" pitchFamily="34" charset="-122"/>
+                <a:cs typeface="Calibri" pitchFamily="34" charset="-120"/>
+              </a:rPr>
+              <a:t>Доля вылета</a:t>
+            </a:r>
+            <a:r>
+              <a:rPr lang="en-US" sz="1500" dirty="0">
+                <a:solidFill>
+                  <a:srgbClr val="5F636A"/>
+                </a:solidFill>
+                <a:latin typeface="Calibri" pitchFamily="34" charset="0"/>
+                <a:ea typeface="Calibri" pitchFamily="34" charset="-122"/>
+                <a:cs typeface="Calibri" pitchFamily="34" charset="-120"/>
+              </a:rPr>
+              <a:t> </a:t>
+            </a:r>
+            <a:r>
+              <a:rPr lang="ru-RU" sz="1500" dirty="0">
+                <a:solidFill>
+                  <a:srgbClr val="5F636A"/>
+                </a:solidFill>
+                <a:latin typeface="Calibri" pitchFamily="34" charset="0"/>
+                <a:ea typeface="Calibri" pitchFamily="34" charset="-122"/>
+                <a:cs typeface="Calibri" pitchFamily="34" charset="-120"/>
+              </a:rPr>
+              <a:t>участников </a:t>
+            </a:r>
+            <a:r>
+              <a:rPr lang="en-US" sz="1500" dirty="0">
+                <a:solidFill>
+                  <a:srgbClr val="5F636A"/>
+                </a:solidFill>
+                <a:latin typeface="Calibri" pitchFamily="34" charset="0"/>
+                <a:ea typeface="Calibri" pitchFamily="34" charset="-122"/>
+                <a:cs typeface="Calibri" pitchFamily="34" charset="-120"/>
+              </a:rPr>
+              <a:t>из трёх верхних лиг — 56,2%.</a:t>
+            </a:r>
+            <a:endParaRPr lang="en-US" sz="1500" dirty="0"/>
+          </a:p>
+        </p:txBody>
+      </p:sp>
+    </p:spTree>
+  </p:cSld>
+  <p:clrMapOvr>
+    <a:masterClrMapping/>
+  </p:clrMapOvr>
+</p:sld>
+</file>
+
+<file path=ppt/slides/slide11.xml><?xml version="1.0" encoding="utf-8"?>
+<p:sld xmlns:a="http://schemas.openxmlformats.org/drawingml/2006/main" xmlns:r="http://schemas.openxmlformats.org/officeDocument/2006/relationships" xmlns:p="http://schemas.openxmlformats.org/presentationml/2006/main">
   <p:cSld name="Slide 10">
     <p:bg>
       <p:bgPr>
@@ -5505,7 +5946,7 @@
 </p:sld>
 </file>
 
-<file path=ppt/slides/slide11.xml><?xml version="1.0" encoding="utf-8"?>
+<file path=ppt/slides/slide12.xml><?xml version="1.0" encoding="utf-8"?>
 <p:sld xmlns:a="http://schemas.openxmlformats.org/drawingml/2006/main" xmlns:r="http://schemas.openxmlformats.org/officeDocument/2006/relationships" xmlns:p="http://schemas.openxmlformats.org/presentationml/2006/main">
   <p:cSld name="Slide 11">
     <p:bg>
@@ -7488,7 +7929,7 @@
 </p:sld>
 </file>
 
-<file path=ppt/slides/slide12.xml><?xml version="1.0" encoding="utf-8"?>
+<file path=ppt/slides/slide13.xml><?xml version="1.0" encoding="utf-8"?>
 <p:sld xmlns:a="http://schemas.openxmlformats.org/drawingml/2006/main" xmlns:r="http://schemas.openxmlformats.org/officeDocument/2006/relationships" xmlns:p="http://schemas.openxmlformats.org/presentationml/2006/main">
   <p:cSld name="Slide 12">
     <p:bg>
@@ -8660,7 +9101,7 @@
 </p:sld>
 </file>
 
-<file path=ppt/slides/slide13.xml><?xml version="1.0" encoding="utf-8"?>
+<file path=ppt/slides/slide14.xml><?xml version="1.0" encoding="utf-8"?>
 <p:sld xmlns:a="http://schemas.openxmlformats.org/drawingml/2006/main" xmlns:r="http://schemas.openxmlformats.org/officeDocument/2006/relationships" xmlns:p="http://schemas.openxmlformats.org/presentationml/2006/main">
   <p:cSld name="Slide 13">
     <p:bg>
@@ -9492,7 +9933,7 @@
 </p:sld>
 </file>
 
-<file path=ppt/slides/slide14.xml><?xml version="1.0" encoding="utf-8"?>
+<file path=ppt/slides/slide15.xml><?xml version="1.0" encoding="utf-8"?>
 <p:sld xmlns:a="http://schemas.openxmlformats.org/drawingml/2006/main" xmlns:r="http://schemas.openxmlformats.org/officeDocument/2006/relationships" xmlns:p="http://schemas.openxmlformats.org/presentationml/2006/main">
   <p:cSld name="Slide 14">
     <p:bg>
@@ -16910,15 +17351,7 @@
 
 <file path=ppt/slides/slide9.xml><?xml version="1.0" encoding="utf-8"?>
 <p:sld xmlns:a="http://schemas.openxmlformats.org/drawingml/2006/main" xmlns:r="http://schemas.openxmlformats.org/officeDocument/2006/relationships" xmlns:p="http://schemas.openxmlformats.org/presentationml/2006/main">
-  <p:cSld name="Slide 9">
-    <p:bg>
-      <p:bgPr>
-        <a:solidFill>
-          <a:srgbClr val="FFFFFF"/>
-        </a:solidFill>
-        <a:effectLst/>
-      </p:bgPr>
-    </p:bg>
+  <p:cSld>
     <p:spTree>
       <p:nvGrpSpPr>
         <p:cNvPr id="1" name=""/>
@@ -16935,34 +17368,14 @@
       </p:grpSpPr>
       <p:sp>
         <p:nvSpPr>
-          <p:cNvPr id="2" name="Shape 0"/>
-          <p:cNvSpPr/>
-          <p:nvPr/>
-        </p:nvSpPr>
-        <p:spPr>
-          <a:xfrm>
-            <a:off x="0" y="274320"/>
-            <a:ext cx="2148840" cy="420624"/>
-          </a:xfrm>
-          <a:prstGeom prst="rect">
-            <a:avLst/>
-          </a:prstGeom>
-          <a:solidFill>
-            <a:srgbClr val="000000"/>
-          </a:solidFill>
-          <a:ln/>
-        </p:spPr>
-      </p:sp>
-      <p:sp>
-        <p:nvSpPr>
-          <p:cNvPr id="3" name="Text 1"/>
+          <p:cNvPr id="2" name="Text 0"/>
           <p:cNvSpPr txBox="1"/>
           <p:nvPr/>
         </p:nvSpPr>
         <p:spPr>
           <a:xfrm>
-            <a:off x="566928" y="274320"/>
-            <a:ext cx="1737360" cy="420624"/>
+            <a:off x="10616184" y="292608"/>
+            <a:ext cx="1005840" cy="822960"/>
           </a:xfrm>
           <a:prstGeom prst="rect">
             <a:avLst/>
@@ -16974,34 +17387,95 @@
           <a:bodyPr wrap="square" lIns="0" tIns="0" rIns="0" bIns="0" rtlCol="0" anchor="ctr"/>
           <a:lstStyle/>
           <a:p>
+            <a:pPr marL="0" indent="0" algn="r">
+              <a:buNone/>
+            </a:pPr>
+            <a:r>
+              <a:rPr lang="en-US" sz="4400" b="1" dirty="0">
+                <a:solidFill>
+                  <a:srgbClr val="EFF0F2"/>
+                </a:solidFill>
+                <a:latin typeface="Cambria" pitchFamily="34" charset="0"/>
+                <a:ea typeface="Cambria" pitchFamily="34" charset="-122"/>
+                <a:cs typeface="Cambria" pitchFamily="34" charset="-120"/>
+              </a:rPr>
+              <a:t>8</a:t>
+            </a:r>
+            <a:endParaRPr lang="en-US" sz="4400" dirty="0"/>
+          </a:p>
+        </p:txBody>
+      </p:sp>
+      <p:sp>
+        <p:nvSpPr>
+          <p:cNvPr id="3" name="Text 1"/>
+          <p:cNvSpPr txBox="1"/>
+          <p:nvPr/>
+        </p:nvSpPr>
+        <p:spPr>
+          <a:xfrm>
+            <a:off x="566928" y="384048"/>
+            <a:ext cx="8229600" cy="310896"/>
+          </a:xfrm>
+          <a:prstGeom prst="rect">
+            <a:avLst/>
+          </a:prstGeom>
+          <a:noFill/>
+          <a:ln/>
+        </p:spPr>
+        <p:txBody>
+          <a:bodyPr wrap="square" lIns="0" tIns="0" rIns="0" bIns="0" rtlCol="0" anchor="ctr"/>
+          <a:lstStyle/>
+          <a:p>
             <a:pPr marL="0" indent="0">
               <a:buNone/>
             </a:pPr>
             <a:r>
-              <a:rPr lang="en-US" sz="1400" b="1" kern="0" spc="200" dirty="0">
-                <a:solidFill>
-                  <a:srgbClr val="FFFFFF"/>
-                </a:solidFill>
-                <a:latin typeface="Calibri" pitchFamily="34" charset="0"/>
-                <a:ea typeface="Calibri" pitchFamily="34" charset="-122"/>
-                <a:cs typeface="Calibri" pitchFamily="34" charset="-120"/>
-              </a:rPr>
-              <a:t>APPENDIX 1</a:t>
-            </a:r>
-            <a:endParaRPr lang="en-US" sz="1400" dirty="0"/>
+              <a:rPr lang="en-US" sz="1500" b="1" kern="0" spc="200" dirty="0">
+                <a:solidFill>
+                  <a:srgbClr val="FF5A00"/>
+                </a:solidFill>
+                <a:latin typeface="Calibri" pitchFamily="34" charset="0"/>
+                <a:ea typeface="Calibri" pitchFamily="34" charset="-122"/>
+                <a:cs typeface="Calibri" pitchFamily="34" charset="-120"/>
+              </a:rPr>
+              <a:t>КОМАНДА</a:t>
+            </a:r>
+            <a:endParaRPr lang="en-US" sz="1500" dirty="0"/>
           </a:p>
         </p:txBody>
       </p:sp>
       <p:sp>
         <p:nvSpPr>
-          <p:cNvPr id="4" name="Text 2"/>
+          <p:cNvPr id="5" name="Shape 3"/>
+          <p:cNvSpPr/>
+          <p:nvPr/>
+        </p:nvSpPr>
+        <p:spPr>
+          <a:xfrm>
+            <a:off x="563880" y="1007416"/>
+            <a:ext cx="5391912" cy="3200400"/>
+          </a:xfrm>
+          <a:prstGeom prst="roundRect">
+            <a:avLst>
+              <a:gd name="adj" fmla="val 3429"/>
+            </a:avLst>
+          </a:prstGeom>
+          <a:solidFill>
+            <a:srgbClr val="F1F2F4"/>
+          </a:solidFill>
+          <a:ln/>
+        </p:spPr>
+      </p:sp>
+      <p:sp>
+        <p:nvSpPr>
+          <p:cNvPr id="6" name="Text 4"/>
           <p:cNvSpPr txBox="1"/>
           <p:nvPr/>
         </p:nvSpPr>
         <p:spPr>
           <a:xfrm>
-            <a:off x="10616184" y="292608"/>
-            <a:ext cx="1005840" cy="822960"/>
+            <a:off x="838200" y="1281736"/>
+            <a:ext cx="4843272" cy="438912"/>
           </a:xfrm>
           <a:prstGeom prst="rect">
             <a:avLst/>
@@ -17013,34 +17487,98 @@
           <a:bodyPr wrap="square" lIns="0" tIns="0" rIns="0" bIns="0" rtlCol="0" anchor="ctr"/>
           <a:lstStyle/>
           <a:p>
-            <a:pPr marL="0" indent="0" algn="r">
+            <a:pPr marL="0" indent="0">
               <a:buNone/>
             </a:pPr>
             <a:r>
-              <a:rPr lang="en-US" sz="4400" b="1" dirty="0">
-                <a:solidFill>
-                  <a:srgbClr val="FFD9C2"/>
+              <a:rPr lang="en-US" sz="2200" b="1" dirty="0">
+                <a:solidFill>
+                  <a:srgbClr val="000000"/>
                 </a:solidFill>
                 <a:latin typeface="Cambria" pitchFamily="34" charset="0"/>
                 <a:ea typeface="Cambria" pitchFamily="34" charset="-122"/>
                 <a:cs typeface="Cambria" pitchFamily="34" charset="-120"/>
               </a:rPr>
-              <a:t>A1</a:t>
-            </a:r>
-            <a:endParaRPr lang="en-US" sz="4400" dirty="0"/>
+              <a:t>AI Product</a:t>
+            </a:r>
+            <a:endParaRPr lang="en-US" sz="2200" dirty="0"/>
           </a:p>
         </p:txBody>
       </p:sp>
       <p:sp>
         <p:nvSpPr>
-          <p:cNvPr id="5" name="Text 3"/>
+          <p:cNvPr id="7" name="Text 5"/>
           <p:cNvSpPr txBox="1"/>
           <p:nvPr/>
         </p:nvSpPr>
         <p:spPr>
           <a:xfrm>
-            <a:off x="566928" y="932688"/>
-            <a:ext cx="8229600" cy="310896"/>
+            <a:off x="838200" y="1786082"/>
+            <a:ext cx="4843272" cy="1789537"/>
+          </a:xfrm>
+          <a:prstGeom prst="rect">
+            <a:avLst/>
+          </a:prstGeom>
+          <a:noFill/>
+          <a:ln/>
+        </p:spPr>
+        <p:txBody>
+          <a:bodyPr wrap="square" lIns="0" tIns="0" rIns="0" bIns="0" rtlCol="0" anchor="b"/>
+          <a:lstStyle/>
+          <a:p>
+            <a:pPr marL="0" indent="0">
+              <a:lnSpc>
+                <a:spcPts val="2500"/>
+              </a:lnSpc>
+              <a:buNone/>
+            </a:pPr>
+            <a:r>
+              <a:rPr lang="en-US" sz="1900" dirty="0">
+                <a:solidFill>
+                  <a:srgbClr val="5F636A"/>
+                </a:solidFill>
+                <a:latin typeface="Calibri" pitchFamily="34" charset="0"/>
+                <a:ea typeface="Calibri" pitchFamily="34" charset="-122"/>
+                <a:cs typeface="Calibri" pitchFamily="34" charset="-120"/>
+              </a:rPr>
+              <a:t>Данил Черник. Выбор сегмента и целевой метрики, бэклог гипотез и самое рискованное предположение, конструкция награды и её экономика, план пилота и защитные метрики.</a:t>
+            </a:r>
+            <a:endParaRPr lang="en-US" sz="1900" dirty="0"/>
+          </a:p>
+        </p:txBody>
+      </p:sp>
+      <p:sp>
+        <p:nvSpPr>
+          <p:cNvPr id="8" name="Shape 6"/>
+          <p:cNvSpPr/>
+          <p:nvPr/>
+        </p:nvSpPr>
+        <p:spPr>
+          <a:xfrm>
+            <a:off x="6230112" y="1007416"/>
+            <a:ext cx="5391912" cy="3200400"/>
+          </a:xfrm>
+          <a:prstGeom prst="roundRect">
+            <a:avLst>
+              <a:gd name="adj" fmla="val 3429"/>
+            </a:avLst>
+          </a:prstGeom>
+          <a:solidFill>
+            <a:srgbClr val="F1F2F4"/>
+          </a:solidFill>
+          <a:ln/>
+        </p:spPr>
+      </p:sp>
+      <p:sp>
+        <p:nvSpPr>
+          <p:cNvPr id="9" name="Text 7"/>
+          <p:cNvSpPr txBox="1"/>
+          <p:nvPr/>
+        </p:nvSpPr>
+        <p:spPr>
+          <a:xfrm>
+            <a:off x="6504432" y="1281736"/>
+            <a:ext cx="4843272" cy="438912"/>
           </a:xfrm>
           <a:prstGeom prst="rect">
             <a:avLst/>
@@ -17056,7 +17594,49 @@
               <a:buNone/>
             </a:pPr>
             <a:r>
-              <a:rPr lang="en-US" sz="1500" b="1" kern="0" spc="200" dirty="0">
+              <a:rPr lang="en-US" sz="2200" b="1" dirty="0">
+                <a:solidFill>
+                  <a:srgbClr val="000000"/>
+                </a:solidFill>
+                <a:latin typeface="Cambria" pitchFamily="34" charset="0"/>
+                <a:ea typeface="Cambria" pitchFamily="34" charset="-122"/>
+                <a:cs typeface="Cambria" pitchFamily="34" charset="-120"/>
+              </a:rPr>
+              <a:t>Data / ML и Frontend</a:t>
+            </a:r>
+            <a:endParaRPr lang="en-US" sz="2200" dirty="0"/>
+          </a:p>
+        </p:txBody>
+      </p:sp>
+      <p:sp>
+        <p:nvSpPr>
+          <p:cNvPr id="10" name="Text 8"/>
+          <p:cNvSpPr txBox="1"/>
+          <p:nvPr/>
+        </p:nvSpPr>
+        <p:spPr>
+          <a:xfrm>
+            <a:off x="6504432" y="1786082"/>
+            <a:ext cx="4843272" cy="1789537"/>
+          </a:xfrm>
+          <a:prstGeom prst="rect">
+            <a:avLst/>
+          </a:prstGeom>
+          <a:noFill/>
+          <a:ln/>
+        </p:spPr>
+        <p:txBody>
+          <a:bodyPr wrap="square" lIns="0" tIns="0" rIns="0" bIns="0" rtlCol="0" anchor="b"/>
+          <a:lstStyle/>
+          <a:p>
+            <a:pPr marL="0" indent="0">
+              <a:lnSpc>
+                <a:spcPts val="2500"/>
+              </a:lnSpc>
+              <a:buNone/>
+            </a:pPr>
+            <a:r>
+              <a:rPr lang="en-US" sz="1900" dirty="0">
                 <a:solidFill>
                   <a:srgbClr val="5F636A"/>
                 </a:solidFill>
@@ -17064,22 +17644,22 @@
                 <a:ea typeface="Calibri" pitchFamily="34" charset="-122"/>
                 <a:cs typeface="Calibri" pitchFamily="34" charset="-120"/>
               </a:rPr>
-              <a:t>РАСПРЕДЕЛЕНИЕ ПО ЛИГАМ</a:t>
-            </a:r>
-            <a:endParaRPr lang="en-US" sz="1500" dirty="0"/>
+              <a:t>Константин Фадеев. Генератор синтетики с разметкой накрутки, движок очков, подбор групп, симулятор месячных циклов, расчёт экономики, антифрод-скоринг. Спецификация экранов и кликабельный прототип.</a:t>
+            </a:r>
+            <a:endParaRPr lang="en-US" sz="1900" dirty="0"/>
           </a:p>
         </p:txBody>
       </p:sp>
       <p:sp>
         <p:nvSpPr>
-          <p:cNvPr id="6" name="Text 4"/>
+          <p:cNvPr id="14" name="Text 12"/>
           <p:cNvSpPr txBox="1"/>
           <p:nvPr/>
         </p:nvSpPr>
         <p:spPr>
           <a:xfrm>
-            <a:off x="566928" y="1325880"/>
-            <a:ext cx="10049256" cy="1005840"/>
+            <a:off x="566928" y="6199632"/>
+            <a:ext cx="1371600" cy="310896"/>
           </a:xfrm>
           <a:prstGeom prst="rect">
             <a:avLst/>
@@ -17095,122 +17675,29 @@
               <a:buNone/>
             </a:pPr>
             <a:r>
-              <a:rPr lang="ru-RU" sz="3200" b="1" dirty="0">
+              <a:rPr lang="en-US" sz="1500" b="1" dirty="0">
                 <a:solidFill>
                   <a:srgbClr val="000000"/>
                 </a:solidFill>
-                <a:latin typeface="Cambria" pitchFamily="34" charset="0"/>
-                <a:ea typeface="Cambria" pitchFamily="34" charset="-122"/>
-                <a:cs typeface="Cambria" pitchFamily="34" charset="-120"/>
-              </a:rPr>
-              <a:t>Верхние</a:t>
-            </a:r>
-            <a:r>
-              <a:rPr lang="en-US" sz="3200" b="1" dirty="0">
-                <a:solidFill>
-                  <a:srgbClr val="000000"/>
-                </a:solidFill>
-                <a:latin typeface="Cambria" pitchFamily="34" charset="0"/>
-                <a:ea typeface="Cambria" pitchFamily="34" charset="-122"/>
-                <a:cs typeface="Cambria" pitchFamily="34" charset="-120"/>
-              </a:rPr>
-              <a:t> </a:t>
-            </a:r>
-            <a:r>
-              <a:rPr lang="ru-RU" sz="3200" b="1" dirty="0">
-                <a:solidFill>
-                  <a:srgbClr val="000000"/>
-                </a:solidFill>
-                <a:latin typeface="Cambria" pitchFamily="34" charset="0"/>
-                <a:ea typeface="Cambria" pitchFamily="34" charset="-122"/>
-                <a:cs typeface="Cambria" pitchFamily="34" charset="-120"/>
-              </a:rPr>
-              <a:t>три</a:t>
-            </a:r>
-            <a:r>
-              <a:rPr lang="en-US" sz="3200" b="1" dirty="0">
-                <a:solidFill>
-                  <a:srgbClr val="000000"/>
-                </a:solidFill>
-                <a:latin typeface="Cambria" pitchFamily="34" charset="0"/>
-                <a:ea typeface="Cambria" pitchFamily="34" charset="-122"/>
-                <a:cs typeface="Cambria" pitchFamily="34" charset="-120"/>
-              </a:rPr>
-              <a:t> </a:t>
-            </a:r>
-            <a:r>
-              <a:rPr lang="ru-RU" sz="3200" b="1" dirty="0">
-                <a:solidFill>
-                  <a:srgbClr val="000000"/>
-                </a:solidFill>
-                <a:latin typeface="Cambria" pitchFamily="34" charset="0"/>
-                <a:ea typeface="Cambria" pitchFamily="34" charset="-122"/>
-                <a:cs typeface="Cambria" pitchFamily="34" charset="-120"/>
-              </a:rPr>
-              <a:t>лиги</a:t>
-            </a:r>
-            <a:r>
-              <a:rPr lang="en-US" sz="3200" b="1" dirty="0">
-                <a:solidFill>
-                  <a:srgbClr val="000000"/>
-                </a:solidFill>
-                <a:latin typeface="Cambria" pitchFamily="34" charset="0"/>
-                <a:ea typeface="Cambria" pitchFamily="34" charset="-122"/>
-                <a:cs typeface="Cambria" pitchFamily="34" charset="-120"/>
-              </a:rPr>
-              <a:t> </a:t>
-            </a:r>
-            <a:r>
-              <a:rPr lang="ru-RU" sz="3200" b="1" dirty="0">
-                <a:solidFill>
-                  <a:srgbClr val="000000"/>
-                </a:solidFill>
-                <a:latin typeface="Cambria" pitchFamily="34" charset="0"/>
-                <a:ea typeface="Cambria" pitchFamily="34" charset="-122"/>
-                <a:cs typeface="Cambria" pitchFamily="34" charset="-120"/>
-              </a:rPr>
-              <a:t>включают</a:t>
-            </a:r>
-            <a:r>
-              <a:rPr lang="en-US" sz="3200" b="1" dirty="0">
-                <a:solidFill>
-                  <a:srgbClr val="000000"/>
-                </a:solidFill>
-                <a:latin typeface="Cambria" pitchFamily="34" charset="0"/>
-                <a:ea typeface="Cambria" pitchFamily="34" charset="-122"/>
-                <a:cs typeface="Cambria" pitchFamily="34" charset="-120"/>
-              </a:rPr>
-              <a:t> 0,9% участников</a:t>
-            </a:r>
-            <a:endParaRPr lang="en-US" sz="3200" dirty="0"/>
+                <a:latin typeface="Calibri" pitchFamily="34" charset="0"/>
+                <a:ea typeface="Calibri" pitchFamily="34" charset="-122"/>
+                <a:cs typeface="Calibri" pitchFamily="34" charset="-120"/>
+              </a:rPr>
+              <a:t>5:00</a:t>
+            </a:r>
+            <a:endParaRPr lang="en-US" sz="1500" dirty="0"/>
           </a:p>
         </p:txBody>
       </p:sp>
-      <p:graphicFrame>
-        <p:nvGraphicFramePr>
-          <p:cNvPr id="7" name="Chart 0"/>
-          <p:cNvGraphicFramePr/>
-          <p:nvPr/>
-        </p:nvGraphicFramePr>
-        <p:xfrm>
-          <a:off x="566928" y="2395728"/>
-          <a:ext cx="11055096" cy="2926080"/>
-        </p:xfrm>
-        <a:graphic>
-          <a:graphicData uri="http://schemas.openxmlformats.org/drawingml/2006/chart">
-            <c:chart xmlns:c="http://schemas.openxmlformats.org/drawingml/2006/chart" xmlns:r="http://schemas.openxmlformats.org/officeDocument/2006/relationships" r:id="rId3"/>
-          </a:graphicData>
-        </a:graphic>
-      </p:graphicFrame>
-      <p:sp>
-        <p:nvSpPr>
-          <p:cNvPr id="8" name="Text 5"/>
+      <p:sp>
+        <p:nvSpPr>
+          <p:cNvPr id="15" name="Text 13"/>
           <p:cNvSpPr txBox="1"/>
           <p:nvPr/>
         </p:nvSpPr>
         <p:spPr>
           <a:xfrm>
-            <a:off x="566928" y="6044184"/>
+            <a:off x="1938528" y="6199632"/>
             <a:ext cx="9601200" cy="310896"/>
           </a:xfrm>
           <a:prstGeom prst="rect">
@@ -17227,7 +17714,7 @@
               <a:buNone/>
             </a:pPr>
             <a:r>
-              <a:rPr lang="ru-RU" sz="1500" dirty="0">
+              <a:rPr lang="en-US" sz="1500" dirty="0">
                 <a:solidFill>
                   <a:srgbClr val="5F636A"/>
                 </a:solidFill>
@@ -17235,106 +17722,7 @@
                 <a:ea typeface="Calibri" pitchFamily="34" charset="-122"/>
                 <a:cs typeface="Calibri" pitchFamily="34" charset="-120"/>
               </a:rPr>
-              <a:t>Конец</a:t>
-            </a:r>
-            <a:r>
-              <a:rPr lang="en-US" sz="1500" dirty="0">
-                <a:solidFill>
-                  <a:srgbClr val="5F636A"/>
-                </a:solidFill>
-                <a:latin typeface="Calibri" pitchFamily="34" charset="0"/>
-                <a:ea typeface="Calibri" pitchFamily="34" charset="-122"/>
-                <a:cs typeface="Calibri" pitchFamily="34" charset="-120"/>
-              </a:rPr>
-              <a:t> </a:t>
-            </a:r>
-            <a:r>
-              <a:rPr lang="ru-RU" sz="1500" dirty="0">
-                <a:solidFill>
-                  <a:srgbClr val="5F636A"/>
-                </a:solidFill>
-                <a:latin typeface="Calibri" pitchFamily="34" charset="0"/>
-                <a:ea typeface="Calibri" pitchFamily="34" charset="-122"/>
-                <a:cs typeface="Calibri" pitchFamily="34" charset="-120"/>
-              </a:rPr>
-              <a:t>пятого</a:t>
-            </a:r>
-            <a:r>
-              <a:rPr lang="en-US" sz="1500" dirty="0">
-                <a:solidFill>
-                  <a:srgbClr val="5F636A"/>
-                </a:solidFill>
-                <a:latin typeface="Calibri" pitchFamily="34" charset="0"/>
-                <a:ea typeface="Calibri" pitchFamily="34" charset="-122"/>
-                <a:cs typeface="Calibri" pitchFamily="34" charset="-120"/>
-              </a:rPr>
-              <a:t> </a:t>
-            </a:r>
-            <a:r>
-              <a:rPr lang="ru-RU" sz="1500" dirty="0">
-                <a:solidFill>
-                  <a:srgbClr val="5F636A"/>
-                </a:solidFill>
-                <a:latin typeface="Calibri" pitchFamily="34" charset="0"/>
-                <a:ea typeface="Calibri" pitchFamily="34" charset="-122"/>
-                <a:cs typeface="Calibri" pitchFamily="34" charset="-120"/>
-              </a:rPr>
-              <a:t>месячного </a:t>
-            </a:r>
-            <a:r>
-              <a:rPr lang="en-US" sz="1500" dirty="0">
-                <a:solidFill>
-                  <a:srgbClr val="5F636A"/>
-                </a:solidFill>
-                <a:latin typeface="Calibri" pitchFamily="34" charset="0"/>
-                <a:ea typeface="Calibri" pitchFamily="34" charset="-122"/>
-                <a:cs typeface="Calibri" pitchFamily="34" charset="-120"/>
-              </a:rPr>
-              <a:t>цикла, 7 897 участников. </a:t>
-            </a:r>
-            <a:r>
-              <a:rPr lang="ru-RU" sz="1500" dirty="0">
-                <a:solidFill>
-                  <a:srgbClr val="5F636A"/>
-                </a:solidFill>
-                <a:latin typeface="Calibri" pitchFamily="34" charset="0"/>
-                <a:ea typeface="Calibri" pitchFamily="34" charset="-122"/>
-                <a:cs typeface="Calibri" pitchFamily="34" charset="-120"/>
-              </a:rPr>
-              <a:t>Доля вылета</a:t>
-            </a:r>
-            <a:r>
-              <a:rPr lang="en-US" sz="1500" dirty="0">
-                <a:solidFill>
-                  <a:srgbClr val="5F636A"/>
-                </a:solidFill>
-                <a:latin typeface="Calibri" pitchFamily="34" charset="0"/>
-                <a:ea typeface="Calibri" pitchFamily="34" charset="-122"/>
-                <a:cs typeface="Calibri" pitchFamily="34" charset="-120"/>
-              </a:rPr>
-              <a:t> </a:t>
-            </a:r>
-            <a:r>
-              <a:rPr lang="ru-RU" sz="1500" dirty="0">
-                <a:solidFill>
-                  <a:srgbClr val="5F636A"/>
-                </a:solidFill>
-                <a:latin typeface="Calibri" pitchFamily="34" charset="0"/>
-                <a:ea typeface="Calibri" pitchFamily="34" charset="-122"/>
-                <a:cs typeface="Calibri" pitchFamily="34" charset="-120"/>
-              </a:rPr>
-              <a:t>участников </a:t>
-            </a:r>
-            <a:r>
-              <a:rPr lang="en-US" sz="1500" dirty="0">
-                <a:solidFill>
-                  <a:srgbClr val="5F636A"/>
-                </a:solidFill>
-                <a:latin typeface="Calibri" pitchFamily="34" charset="0"/>
-                <a:ea typeface="Calibri" pitchFamily="34" charset="-122"/>
-                <a:cs typeface="Calibri" pitchFamily="34" charset="-120"/>
-              </a:rPr>
-              <a:t>из трёх верхних лиг — 56,2%.</a:t>
+              <a:t>роли · зоны ответственности</a:t>
             </a:r>
             <a:endParaRPr lang="en-US" sz="1500" dirty="0"/>
           </a:p>
